--- a/defensive-publications/emv-data-enhancement.pptx
+++ b/defensive-publications/emv-data-enhancement.pptx
@@ -3475,6 +3475,7 @@
             </a:bodyPr>
             <a:lstStyle/>
             <a:p>
+              <a:pPr algn="r"/>
               <a:r>
                 <a:rPr lang="en-US" noProof="1">
                   <a:cs typeface="Courier New" panose="02070309020205020404" pitchFamily="49" charset="0"/>
@@ -3578,6 +3579,7 @@
             </a:bodyPr>
             <a:lstStyle/>
             <a:p>
+              <a:pPr algn="ctr"/>
               <a:r>
                 <a:rPr lang="en-US" noProof="1">
                   <a:cs typeface="Courier New" panose="02070309020205020404" pitchFamily="49" charset="0"/>
@@ -3602,10 +3604,10 @@
         </p:nvGrpSpPr>
         <p:grpSpPr>
           <a:xfrm>
-            <a:off x="2748429" y="4813275"/>
-            <a:ext cx="2171055" cy="371675"/>
-            <a:chOff x="1815164" y="4928894"/>
-            <a:chExt cx="2171055" cy="371675"/>
+            <a:off x="1716208" y="4826136"/>
+            <a:ext cx="2915955" cy="369332"/>
+            <a:chOff x="2107245" y="4931237"/>
+            <a:chExt cx="2915955" cy="369332"/>
           </a:xfrm>
         </p:grpSpPr>
         <p:sp>
@@ -3622,7 +3624,7 @@
           </p:nvSpPr>
           <p:spPr>
             <a:xfrm>
-              <a:off x="1815164" y="4928894"/>
+              <a:off x="2107245" y="4931237"/>
               <a:ext cx="992579" cy="369332"/>
             </a:xfrm>
             <a:prstGeom prst="rect">
@@ -3658,8 +3660,8 @@
           </p:nvSpPr>
           <p:spPr>
             <a:xfrm>
-              <a:off x="2831736" y="4931237"/>
-              <a:ext cx="1154483" cy="369332"/>
+              <a:off x="3117870" y="4931237"/>
+              <a:ext cx="1905330" cy="369332"/>
             </a:xfrm>
             <a:prstGeom prst="rect">
               <a:avLst/>
@@ -3681,11 +3683,12 @@
             </a:bodyPr>
             <a:lstStyle/>
             <a:p>
+              <a:pPr algn="ctr"/>
               <a:r>
                 <a:rPr lang="en-US" noProof="1">
                   <a:cs typeface="Courier New" panose="02070309020205020404" pitchFamily="49" charset="0"/>
                 </a:rPr>
-                <a:t>URL String</a:t>
+                <a:t>URL or Host Name</a:t>
               </a:r>
             </a:p>
           </p:txBody>
@@ -3814,7 +3817,7 @@
           <a:p>
             <a:r>
               <a:rPr lang="en-US" sz="1600" dirty="0"/>
-              <a:t>This solution eliminates Account ID to issuer URL lookup databases. An even better solution would be </a:t>
+              <a:t>This solution eliminates Account ID to issuer URL lookup databases. An even better solution would be the </a:t>
             </a:r>
             <a:r>
               <a:rPr lang="en-US" sz="1600" dirty="0">

--- a/defensive-publications/emv-data-enhancement.pptx
+++ b/defensive-publications/emv-data-enhancement.pptx
@@ -3604,7 +3604,7 @@
         </p:nvGrpSpPr>
         <p:grpSpPr>
           <a:xfrm>
-            <a:off x="1716208" y="4826136"/>
+            <a:off x="2010494" y="4815626"/>
             <a:ext cx="2915955" cy="369332"/>
             <a:chOff x="2107245" y="4931237"/>
             <a:chExt cx="2915955" cy="369332"/>

--- a/defensive-publications/emv-data-enhancement.pptx
+++ b/defensive-publications/emv-data-enhancement.pptx
@@ -3274,8 +3274,8 @@
         </p:nvSpPr>
         <p:spPr>
           <a:xfrm>
-            <a:off x="3045823" y="935880"/>
-            <a:ext cx="2326213" cy="369332"/>
+            <a:off x="3041625" y="935880"/>
+            <a:ext cx="3633687" cy="369332"/>
           </a:xfrm>
           <a:prstGeom prst="rect">
             <a:avLst/>
@@ -3291,7 +3291,7 @@
             <a:pPr algn="r"/>
             <a:r>
               <a:rPr lang="en-US" dirty="0"/>
-              <a:t>EMV Account ID (PAN)</a:t>
+              <a:t>EMV Primary Account Number (PAN)</a:t>
             </a:r>
           </a:p>
         </p:txBody>
@@ -3310,8 +3310,8 @@
         </p:nvSpPr>
         <p:spPr>
           <a:xfrm>
-            <a:off x="5370381" y="938223"/>
-            <a:ext cx="2210863" cy="369332"/>
+            <a:off x="6673657" y="938223"/>
+            <a:ext cx="2210862" cy="350865"/>
           </a:xfrm>
           <a:prstGeom prst="rect">
             <a:avLst/>
@@ -3330,7 +3330,7 @@
           </a:ln>
         </p:spPr>
         <p:txBody>
-          <a:bodyPr wrap="none" rtlCol="0">
+          <a:bodyPr wrap="none" tIns="27432" rtlCol="0">
             <a:spAutoFit/>
           </a:bodyPr>
           <a:lstStyle/>

--- a/defensive-publications/emv-data-enhancement.pptx
+++ b/defensive-publications/emv-data-enhancement.pptx
@@ -4118,7 +4118,7 @@
         </p:nvSpPr>
         <p:spPr>
           <a:xfrm rot="16200000">
-            <a:off x="5931497" y="1557218"/>
+            <a:off x="5931497" y="1504668"/>
             <a:ext cx="252000" cy="154800"/>
           </a:xfrm>
           <a:prstGeom prst="leftArrow">

--- a/defensive-publications/emv-data-enhancement.pptx
+++ b/defensive-publications/emv-data-enhancement.pptx
@@ -3817,7 +3817,15 @@
           <a:p>
             <a:r>
               <a:rPr lang="en-US" sz="1600" dirty="0"/>
-              <a:t>This solution eliminates Account ID to issuer URL lookup databases. An even better solution would be the </a:t>
+              <a:t>This solution </a:t>
+            </a:r>
+            <a:r>
+              <a:rPr lang="en-US" sz="1600"/>
+              <a:t>eliminates PAN </a:t>
+            </a:r>
+            <a:r>
+              <a:rPr lang="en-US" sz="1600" dirty="0"/>
+              <a:t>to issuer URL lookup databases. An even better solution would be the </a:t>
             </a:r>
             <a:r>
               <a:rPr lang="en-US" sz="1600" dirty="0">

--- a/defensive-publications/emv-data-enhancement.pptx
+++ b/defensive-publications/emv-data-enhancement.pptx
@@ -3216,6 +3216,73 @@
       </p:grpSpPr>
       <p:sp>
         <p:nvSpPr>
+          <p:cNvPr id="10" name="Rectangle 9">
+            <a:extLst>
+              <a:ext uri="{FF2B5EF4-FFF2-40B4-BE49-F238E27FC236}">
+                <a16:creationId xmlns:a16="http://schemas.microsoft.com/office/drawing/2014/main" id="{DCCD7186-C6E2-3461-0C05-BA47BC1C6F91}"/>
+              </a:ext>
+            </a:extLst>
+          </p:cNvPr>
+          <p:cNvSpPr/>
+          <p:nvPr/>
+        </p:nvSpPr>
+        <p:spPr>
+          <a:xfrm>
+            <a:off x="489433" y="2275389"/>
+            <a:ext cx="11246675" cy="3201388"/>
+          </a:xfrm>
+          <a:prstGeom prst="rect">
+            <a:avLst/>
+          </a:prstGeom>
+          <a:solidFill>
+            <a:srgbClr val="FFFFE4"/>
+          </a:solidFill>
+          <a:ln>
+            <a:solidFill>
+              <a:schemeClr val="tx1">
+                <a:lumMod val="85000"/>
+                <a:lumOff val="15000"/>
+              </a:schemeClr>
+            </a:solidFill>
+          </a:ln>
+          <a:effectLst>
+            <a:outerShdw blurRad="50800" dist="38100" dir="2700000" algn="tl" rotWithShape="0">
+              <a:prstClr val="black">
+                <a:alpha val="40000"/>
+              </a:prstClr>
+            </a:outerShdw>
+          </a:effectLst>
+        </p:spPr>
+        <p:style>
+          <a:lnRef idx="2">
+            <a:schemeClr val="accent1">
+              <a:shade val="50000"/>
+            </a:schemeClr>
+          </a:lnRef>
+          <a:fillRef idx="1">
+            <a:schemeClr val="accent1"/>
+          </a:fillRef>
+          <a:effectRef idx="0">
+            <a:schemeClr val="accent1"/>
+          </a:effectRef>
+          <a:fontRef idx="minor">
+            <a:schemeClr val="lt1"/>
+          </a:fontRef>
+        </p:style>
+        <p:txBody>
+          <a:bodyPr rtlCol="0" anchor="ctr"/>
+          <a:lstStyle/>
+          <a:p>
+            <a:pPr algn="ctr"/>
+            <a:r>
+              <a:rPr lang="en-US" dirty="0"/>
+              <a:t> </a:t>
+            </a:r>
+          </a:p>
+        </p:txBody>
+      </p:sp>
+      <p:sp>
+        <p:nvSpPr>
           <p:cNvPr id="4" name="TextBox 3">
             <a:extLst>
               <a:ext uri="{FF2B5EF4-FFF2-40B4-BE49-F238E27FC236}">
@@ -3382,324 +3449,12 @@
           </a:p>
         </p:txBody>
       </p:sp>
-      <p:grpSp>
-        <p:nvGrpSpPr>
-          <p:cNvPr id="3" name="Group 2">
-            <a:extLst>
-              <a:ext uri="{FF2B5EF4-FFF2-40B4-BE49-F238E27FC236}">
-                <a16:creationId xmlns:a16="http://schemas.microsoft.com/office/drawing/2014/main" id="{75D34477-10C3-1367-D3C3-E1733179EA47}"/>
-              </a:ext>
-            </a:extLst>
-          </p:cNvPr>
-          <p:cNvGrpSpPr/>
-          <p:nvPr/>
-        </p:nvGrpSpPr>
-        <p:grpSpPr>
-          <a:xfrm>
-            <a:off x="1222947" y="2663004"/>
-            <a:ext cx="3696537" cy="371675"/>
-            <a:chOff x="1602798" y="2497128"/>
-            <a:chExt cx="3696537" cy="371675"/>
-          </a:xfrm>
-        </p:grpSpPr>
-        <p:sp>
-          <p:nvSpPr>
-            <p:cNvPr id="74" name="TextBox 73">
-              <a:extLst>
-                <a:ext uri="{FF2B5EF4-FFF2-40B4-BE49-F238E27FC236}">
-                  <a16:creationId xmlns:a16="http://schemas.microsoft.com/office/drawing/2014/main" id="{79C9EE33-F184-905B-0A78-A090867373BE}"/>
-                </a:ext>
-              </a:extLst>
-            </p:cNvPr>
-            <p:cNvSpPr txBox="1"/>
-            <p:nvPr/>
-          </p:nvSpPr>
-          <p:spPr>
-            <a:xfrm>
-              <a:off x="1602798" y="2497128"/>
-              <a:ext cx="1204945" cy="369332"/>
-            </a:xfrm>
-            <a:prstGeom prst="rect">
-              <a:avLst/>
-            </a:prstGeom>
-            <a:noFill/>
-          </p:spPr>
-          <p:txBody>
-            <a:bodyPr wrap="none" rtlCol="0">
-              <a:spAutoFit/>
-            </a:bodyPr>
-            <a:lstStyle/>
-            <a:p>
-              <a:pPr algn="r"/>
-              <a:r>
-                <a:rPr lang="en-US" dirty="0"/>
-                <a:t>Account ID</a:t>
-              </a:r>
-            </a:p>
-          </p:txBody>
-        </p:sp>
-        <p:sp>
-          <p:nvSpPr>
-            <p:cNvPr id="75" name="TextBox 74">
-              <a:extLst>
-                <a:ext uri="{FF2B5EF4-FFF2-40B4-BE49-F238E27FC236}">
-                  <a16:creationId xmlns:a16="http://schemas.microsoft.com/office/drawing/2014/main" id="{71513512-89A7-EB24-EFD9-CC1F7F68FAF3}"/>
-                </a:ext>
-              </a:extLst>
-            </p:cNvPr>
-            <p:cNvSpPr txBox="1"/>
-            <p:nvPr/>
-          </p:nvSpPr>
-          <p:spPr>
-            <a:xfrm>
-              <a:off x="2831736" y="2499471"/>
-              <a:ext cx="2467599" cy="369332"/>
-            </a:xfrm>
-            <a:prstGeom prst="rect">
-              <a:avLst/>
-            </a:prstGeom>
-            <a:solidFill>
-              <a:srgbClr val="F6FAF4"/>
-            </a:solidFill>
-            <a:ln>
-              <a:solidFill>
-                <a:schemeClr val="bg1">
-                  <a:lumMod val="75000"/>
-                </a:schemeClr>
-              </a:solidFill>
-            </a:ln>
-          </p:spPr>
-          <p:txBody>
-            <a:bodyPr wrap="none" rtlCol="0">
-              <a:spAutoFit/>
-            </a:bodyPr>
-            <a:lstStyle/>
-            <a:p>
-              <a:pPr algn="r"/>
-              <a:r>
-                <a:rPr lang="en-US" noProof="1">
-                  <a:cs typeface="Courier New" panose="02070309020205020404" pitchFamily="49" charset="0"/>
-                </a:rPr>
-                <a:t>Account Identifier String</a:t>
-              </a:r>
-            </a:p>
-          </p:txBody>
-        </p:sp>
-      </p:grpSp>
-      <p:grpSp>
-        <p:nvGrpSpPr>
-          <p:cNvPr id="5" name="Group 4">
-            <a:extLst>
-              <a:ext uri="{FF2B5EF4-FFF2-40B4-BE49-F238E27FC236}">
-                <a16:creationId xmlns:a16="http://schemas.microsoft.com/office/drawing/2014/main" id="{ED6E3F4A-81AA-A0C2-ABAC-31BCC0E3E0D7}"/>
-              </a:ext>
-            </a:extLst>
-          </p:cNvPr>
-          <p:cNvGrpSpPr/>
-          <p:nvPr/>
-        </p:nvGrpSpPr>
-        <p:grpSpPr>
-          <a:xfrm>
-            <a:off x="597455" y="3709008"/>
-            <a:ext cx="4322029" cy="371675"/>
-            <a:chOff x="686906" y="3693136"/>
-            <a:chExt cx="4322029" cy="371675"/>
-          </a:xfrm>
-        </p:grpSpPr>
-        <p:sp>
-          <p:nvSpPr>
-            <p:cNvPr id="76" name="TextBox 75">
-              <a:extLst>
-                <a:ext uri="{FF2B5EF4-FFF2-40B4-BE49-F238E27FC236}">
-                  <a16:creationId xmlns:a16="http://schemas.microsoft.com/office/drawing/2014/main" id="{14543415-F08E-D9F9-6465-D79AE8EB47DB}"/>
-                </a:ext>
-              </a:extLst>
-            </p:cNvPr>
-            <p:cNvSpPr txBox="1"/>
-            <p:nvPr/>
-          </p:nvSpPr>
-          <p:spPr>
-            <a:xfrm>
-              <a:off x="686906" y="3693136"/>
-              <a:ext cx="2120837" cy="369332"/>
-            </a:xfrm>
-            <a:prstGeom prst="rect">
-              <a:avLst/>
-            </a:prstGeom>
-            <a:noFill/>
-          </p:spPr>
-          <p:txBody>
-            <a:bodyPr wrap="none" rtlCol="0">
-              <a:spAutoFit/>
-            </a:bodyPr>
-            <a:lstStyle/>
-            <a:p>
-              <a:pPr algn="r"/>
-              <a:r>
-                <a:rPr lang="en-US" dirty="0"/>
-                <a:t>Payment Network ID</a:t>
-              </a:r>
-            </a:p>
-          </p:txBody>
-        </p:sp>
-        <p:sp>
-          <p:nvSpPr>
-            <p:cNvPr id="77" name="TextBox 76">
-              <a:extLst>
-                <a:ext uri="{FF2B5EF4-FFF2-40B4-BE49-F238E27FC236}">
-                  <a16:creationId xmlns:a16="http://schemas.microsoft.com/office/drawing/2014/main" id="{9675B1F4-775F-E04C-FBEE-39CC896F00F0}"/>
-                </a:ext>
-              </a:extLst>
-            </p:cNvPr>
-            <p:cNvSpPr txBox="1"/>
-            <p:nvPr/>
-          </p:nvSpPr>
-          <p:spPr>
-            <a:xfrm>
-              <a:off x="2831736" y="3695479"/>
-              <a:ext cx="2177199" cy="369332"/>
-            </a:xfrm>
-            <a:prstGeom prst="rect">
-              <a:avLst/>
-            </a:prstGeom>
-            <a:solidFill>
-              <a:srgbClr val="F6FAF4"/>
-            </a:solidFill>
-            <a:ln>
-              <a:solidFill>
-                <a:schemeClr val="bg1">
-                  <a:lumMod val="75000"/>
-                </a:schemeClr>
-              </a:solidFill>
-            </a:ln>
-          </p:spPr>
-          <p:txBody>
-            <a:bodyPr wrap="none" rtlCol="0">
-              <a:spAutoFit/>
-            </a:bodyPr>
-            <a:lstStyle/>
-            <a:p>
-              <a:pPr algn="ctr"/>
-              <a:r>
-                <a:rPr lang="en-US" noProof="1">
-                  <a:cs typeface="Courier New" panose="02070309020205020404" pitchFamily="49" charset="0"/>
-                </a:rPr>
-                <a:t>URL or Specfic String</a:t>
-              </a:r>
-            </a:p>
-          </p:txBody>
-        </p:sp>
-      </p:grpSp>
-      <p:grpSp>
-        <p:nvGrpSpPr>
-          <p:cNvPr id="6" name="Group 5">
-            <a:extLst>
-              <a:ext uri="{FF2B5EF4-FFF2-40B4-BE49-F238E27FC236}">
-                <a16:creationId xmlns:a16="http://schemas.microsoft.com/office/drawing/2014/main" id="{C272F915-EA31-DE6A-0FF1-DAA3239B1C98}"/>
-              </a:ext>
-            </a:extLst>
-          </p:cNvPr>
-          <p:cNvGrpSpPr/>
-          <p:nvPr/>
-        </p:nvGrpSpPr>
-        <p:grpSpPr>
-          <a:xfrm>
-            <a:off x="2010494" y="4815626"/>
-            <a:ext cx="2915955" cy="369332"/>
-            <a:chOff x="2107245" y="4931237"/>
-            <a:chExt cx="2915955" cy="369332"/>
-          </a:xfrm>
-        </p:grpSpPr>
-        <p:sp>
-          <p:nvSpPr>
-            <p:cNvPr id="78" name="TextBox 77">
-              <a:extLst>
-                <a:ext uri="{FF2B5EF4-FFF2-40B4-BE49-F238E27FC236}">
-                  <a16:creationId xmlns:a16="http://schemas.microsoft.com/office/drawing/2014/main" id="{9061E2C2-9C66-6CCC-A043-84DF4FFCD913}"/>
-                </a:ext>
-              </a:extLst>
-            </p:cNvPr>
-            <p:cNvSpPr txBox="1"/>
-            <p:nvPr/>
-          </p:nvSpPr>
-          <p:spPr>
-            <a:xfrm>
-              <a:off x="2107245" y="4931237"/>
-              <a:ext cx="992579" cy="369332"/>
-            </a:xfrm>
-            <a:prstGeom prst="rect">
-              <a:avLst/>
-            </a:prstGeom>
-            <a:noFill/>
-          </p:spPr>
-          <p:txBody>
-            <a:bodyPr wrap="none" rtlCol="0">
-              <a:spAutoFit/>
-            </a:bodyPr>
-            <a:lstStyle/>
-            <a:p>
-              <a:pPr algn="r"/>
-              <a:r>
-                <a:rPr lang="en-US" dirty="0"/>
-                <a:t>Issuer ID</a:t>
-              </a:r>
-            </a:p>
-          </p:txBody>
-        </p:sp>
-        <p:sp>
-          <p:nvSpPr>
-            <p:cNvPr id="79" name="TextBox 78">
-              <a:extLst>
-                <a:ext uri="{FF2B5EF4-FFF2-40B4-BE49-F238E27FC236}">
-                  <a16:creationId xmlns:a16="http://schemas.microsoft.com/office/drawing/2014/main" id="{510ECAB9-2E36-3C32-1E28-9EAA999E0512}"/>
-                </a:ext>
-              </a:extLst>
-            </p:cNvPr>
-            <p:cNvSpPr txBox="1"/>
-            <p:nvPr/>
-          </p:nvSpPr>
-          <p:spPr>
-            <a:xfrm>
-              <a:off x="3117870" y="4931237"/>
-              <a:ext cx="1905330" cy="369332"/>
-            </a:xfrm>
-            <a:prstGeom prst="rect">
-              <a:avLst/>
-            </a:prstGeom>
-            <a:solidFill>
-              <a:srgbClr val="F6FAF4"/>
-            </a:solidFill>
-            <a:ln>
-              <a:solidFill>
-                <a:schemeClr val="bg1">
-                  <a:lumMod val="75000"/>
-                </a:schemeClr>
-              </a:solidFill>
-            </a:ln>
-          </p:spPr>
-          <p:txBody>
-            <a:bodyPr wrap="none" rtlCol="0">
-              <a:spAutoFit/>
-            </a:bodyPr>
-            <a:lstStyle/>
-            <a:p>
-              <a:pPr algn="ctr"/>
-              <a:r>
-                <a:rPr lang="en-US" noProof="1">
-                  <a:cs typeface="Courier New" panose="02070309020205020404" pitchFamily="49" charset="0"/>
-                </a:rPr>
-                <a:t>URL or Host Name</a:t>
-              </a:r>
-            </a:p>
-          </p:txBody>
-        </p:sp>
-      </p:grpSp>
-      <p:sp>
-        <p:nvSpPr>
-          <p:cNvPr id="83" name="TextBox 82">
-            <a:extLst>
-              <a:ext uri="{FF2B5EF4-FFF2-40B4-BE49-F238E27FC236}">
-                <a16:creationId xmlns:a16="http://schemas.microsoft.com/office/drawing/2014/main" id="{0803AA31-931D-51B8-76F4-83E7886BACD1}"/>
+      <p:sp>
+        <p:nvSpPr>
+          <p:cNvPr id="74" name="TextBox 73">
+            <a:extLst>
+              <a:ext uri="{FF2B5EF4-FFF2-40B4-BE49-F238E27FC236}">
+                <a16:creationId xmlns:a16="http://schemas.microsoft.com/office/drawing/2014/main" id="{79C9EE33-F184-905B-0A78-A090867373BE}"/>
               </a:ext>
             </a:extLst>
           </p:cNvPr>
@@ -3708,7 +3463,195 @@
         </p:nvSpPr>
         <p:spPr>
           <a:xfrm>
-            <a:off x="5169184" y="2455968"/>
+            <a:off x="1663292" y="2674792"/>
+            <a:ext cx="1204945" cy="369332"/>
+          </a:xfrm>
+          <a:prstGeom prst="rect">
+            <a:avLst/>
+          </a:prstGeom>
+          <a:solidFill>
+            <a:schemeClr val="accent1">
+              <a:lumMod val="75000"/>
+            </a:schemeClr>
+          </a:solidFill>
+        </p:spPr>
+        <p:txBody>
+          <a:bodyPr wrap="none" rtlCol="0">
+            <a:spAutoFit/>
+          </a:bodyPr>
+          <a:lstStyle/>
+          <a:p>
+            <a:pPr algn="r"/>
+            <a:r>
+              <a:rPr lang="en-US" dirty="0">
+                <a:solidFill>
+                  <a:schemeClr val="accent6">
+                    <a:lumMod val="40000"/>
+                    <a:lumOff val="60000"/>
+                  </a:schemeClr>
+                </a:solidFill>
+              </a:rPr>
+              <a:t>Account ID</a:t>
+            </a:r>
+          </a:p>
+        </p:txBody>
+      </p:sp>
+      <p:sp>
+        <p:nvSpPr>
+          <p:cNvPr id="75" name="TextBox 74">
+            <a:extLst>
+              <a:ext uri="{FF2B5EF4-FFF2-40B4-BE49-F238E27FC236}">
+                <a16:creationId xmlns:a16="http://schemas.microsoft.com/office/drawing/2014/main" id="{71513512-89A7-EB24-EFD9-CC1F7F68FAF3}"/>
+              </a:ext>
+            </a:extLst>
+          </p:cNvPr>
+          <p:cNvSpPr txBox="1"/>
+          <p:nvPr/>
+        </p:nvSpPr>
+        <p:spPr>
+          <a:xfrm>
+            <a:off x="3141743" y="2669894"/>
+            <a:ext cx="731290" cy="369332"/>
+          </a:xfrm>
+          <a:prstGeom prst="rect">
+            <a:avLst/>
+          </a:prstGeom>
+          <a:solidFill>
+            <a:srgbClr val="F6FAF4"/>
+          </a:solidFill>
+          <a:ln>
+            <a:solidFill>
+              <a:schemeClr val="bg1">
+                <a:lumMod val="75000"/>
+              </a:schemeClr>
+            </a:solidFill>
+          </a:ln>
+        </p:spPr>
+        <p:txBody>
+          <a:bodyPr wrap="none" rtlCol="0">
+            <a:spAutoFit/>
+          </a:bodyPr>
+          <a:lstStyle/>
+          <a:p>
+            <a:pPr algn="r"/>
+            <a:r>
+              <a:rPr lang="en-US" noProof="1">
+                <a:cs typeface="Courier New" panose="02070309020205020404" pitchFamily="49" charset="0"/>
+              </a:rPr>
+              <a:t>String</a:t>
+            </a:r>
+          </a:p>
+        </p:txBody>
+      </p:sp>
+      <p:sp>
+        <p:nvSpPr>
+          <p:cNvPr id="76" name="TextBox 75">
+            <a:extLst>
+              <a:ext uri="{FF2B5EF4-FFF2-40B4-BE49-F238E27FC236}">
+                <a16:creationId xmlns:a16="http://schemas.microsoft.com/office/drawing/2014/main" id="{14543415-F08E-D9F9-6465-D79AE8EB47DB}"/>
+              </a:ext>
+            </a:extLst>
+          </p:cNvPr>
+          <p:cNvSpPr txBox="1"/>
+          <p:nvPr/>
+        </p:nvSpPr>
+        <p:spPr>
+          <a:xfrm>
+            <a:off x="747400" y="3732490"/>
+            <a:ext cx="2120837" cy="369332"/>
+          </a:xfrm>
+          <a:prstGeom prst="rect">
+            <a:avLst/>
+          </a:prstGeom>
+          <a:solidFill>
+            <a:schemeClr val="accent1">
+              <a:lumMod val="75000"/>
+            </a:schemeClr>
+          </a:solidFill>
+        </p:spPr>
+        <p:txBody>
+          <a:bodyPr wrap="none" rtlCol="0">
+            <a:spAutoFit/>
+          </a:bodyPr>
+          <a:lstStyle/>
+          <a:p>
+            <a:pPr algn="r"/>
+            <a:r>
+              <a:rPr lang="en-US" dirty="0">
+                <a:solidFill>
+                  <a:schemeClr val="accent6">
+                    <a:lumMod val="40000"/>
+                    <a:lumOff val="60000"/>
+                  </a:schemeClr>
+                </a:solidFill>
+              </a:rPr>
+              <a:t>Payment Network ID</a:t>
+            </a:r>
+          </a:p>
+        </p:txBody>
+      </p:sp>
+      <p:sp>
+        <p:nvSpPr>
+          <p:cNvPr id="77" name="TextBox 76">
+            <a:extLst>
+              <a:ext uri="{FF2B5EF4-FFF2-40B4-BE49-F238E27FC236}">
+                <a16:creationId xmlns:a16="http://schemas.microsoft.com/office/drawing/2014/main" id="{9675B1F4-775F-E04C-FBEE-39CC896F00F0}"/>
+              </a:ext>
+            </a:extLst>
+          </p:cNvPr>
+          <p:cNvSpPr txBox="1"/>
+          <p:nvPr/>
+        </p:nvSpPr>
+        <p:spPr>
+          <a:xfrm>
+            <a:off x="3144479" y="3737166"/>
+            <a:ext cx="1409360" cy="369332"/>
+          </a:xfrm>
+          <a:prstGeom prst="rect">
+            <a:avLst/>
+          </a:prstGeom>
+          <a:solidFill>
+            <a:srgbClr val="F6FAF4"/>
+          </a:solidFill>
+          <a:ln>
+            <a:solidFill>
+              <a:schemeClr val="bg1">
+                <a:lumMod val="75000"/>
+              </a:schemeClr>
+            </a:solidFill>
+          </a:ln>
+        </p:spPr>
+        <p:txBody>
+          <a:bodyPr wrap="none" rtlCol="0">
+            <a:spAutoFit/>
+          </a:bodyPr>
+          <a:lstStyle/>
+          <a:p>
+            <a:pPr algn="ctr"/>
+            <a:r>
+              <a:rPr lang="en-US" noProof="1">
+                <a:cs typeface="Courier New" panose="02070309020205020404" pitchFamily="49" charset="0"/>
+              </a:rPr>
+              <a:t>URL or String</a:t>
+            </a:r>
+          </a:p>
+        </p:txBody>
+      </p:sp>
+      <p:sp>
+        <p:nvSpPr>
+          <p:cNvPr id="83" name="TextBox 82">
+            <a:extLst>
+              <a:ext uri="{FF2B5EF4-FFF2-40B4-BE49-F238E27FC236}">
+                <a16:creationId xmlns:a16="http://schemas.microsoft.com/office/drawing/2014/main" id="{0803AA31-931D-51B8-76F4-83E7886BACD1}"/>
+              </a:ext>
+            </a:extLst>
+          </p:cNvPr>
+          <p:cNvSpPr txBox="1"/>
+          <p:nvPr/>
+        </p:nvSpPr>
+        <p:spPr>
+          <a:xfrm>
+            <a:off x="5169184" y="2431254"/>
             <a:ext cx="6062033" cy="830997"/>
           </a:xfrm>
           <a:prstGeom prst="rect">
@@ -3780,7 +3723,7 @@
         </p:nvSpPr>
         <p:spPr>
           <a:xfrm>
-            <a:off x="5169184" y="4596252"/>
+            <a:off x="5169184" y="4534467"/>
             <a:ext cx="6558990" cy="830997"/>
           </a:xfrm>
           <a:prstGeom prst="rect">
@@ -3958,64 +3901,6 @@
             <a:r>
               <a:rPr lang="en-US" dirty="0"/>
               <a:t>The variables above are the only elements that protocol-wise separate user authorizations for different payment networks, while from the user’s perspective, only card images differ.</a:t>
-            </a:r>
-          </a:p>
-        </p:txBody>
-      </p:sp>
-      <p:sp>
-        <p:nvSpPr>
-          <p:cNvPr id="10" name="Rectangle 9">
-            <a:extLst>
-              <a:ext uri="{FF2B5EF4-FFF2-40B4-BE49-F238E27FC236}">
-                <a16:creationId xmlns:a16="http://schemas.microsoft.com/office/drawing/2014/main" id="{DCCD7186-C6E2-3461-0C05-BA47BC1C6F91}"/>
-              </a:ext>
-            </a:extLst>
-          </p:cNvPr>
-          <p:cNvSpPr/>
-          <p:nvPr/>
-        </p:nvSpPr>
-        <p:spPr>
-          <a:xfrm>
-            <a:off x="477077" y="2337174"/>
-            <a:ext cx="11246675" cy="3201388"/>
-          </a:xfrm>
-          <a:prstGeom prst="rect">
-            <a:avLst/>
-          </a:prstGeom>
-          <a:noFill/>
-          <a:ln>
-            <a:solidFill>
-              <a:schemeClr val="tx1">
-                <a:lumMod val="85000"/>
-                <a:lumOff val="15000"/>
-              </a:schemeClr>
-            </a:solidFill>
-          </a:ln>
-        </p:spPr>
-        <p:style>
-          <a:lnRef idx="2">
-            <a:schemeClr val="accent1">
-              <a:shade val="50000"/>
-            </a:schemeClr>
-          </a:lnRef>
-          <a:fillRef idx="1">
-            <a:schemeClr val="accent1"/>
-          </a:fillRef>
-          <a:effectRef idx="0">
-            <a:schemeClr val="accent1"/>
-          </a:effectRef>
-          <a:fontRef idx="minor">
-            <a:schemeClr val="lt1"/>
-          </a:fontRef>
-        </p:style>
-        <p:txBody>
-          <a:bodyPr rtlCol="0" anchor="ctr"/>
-          <a:lstStyle/>
-          <a:p>
-            <a:pPr algn="ctr"/>
-            <a:r>
-              <a:rPr lang="en-US" dirty="0"/>
-              <a:t> </a:t>
             </a:r>
           </a:p>
         </p:txBody>
@@ -4169,6 +4054,100 @@
           <a:p>
             <a:pPr algn="ctr"/>
             <a:endParaRPr lang="en-US"/>
+          </a:p>
+        </p:txBody>
+      </p:sp>
+      <p:sp>
+        <p:nvSpPr>
+          <p:cNvPr id="13" name="TextBox 12">
+            <a:extLst>
+              <a:ext uri="{FF2B5EF4-FFF2-40B4-BE49-F238E27FC236}">
+                <a16:creationId xmlns:a16="http://schemas.microsoft.com/office/drawing/2014/main" id="{AC3565A6-E974-4DB6-51FD-8680C87065E2}"/>
+              </a:ext>
+            </a:extLst>
+          </p:cNvPr>
+          <p:cNvSpPr txBox="1"/>
+          <p:nvPr/>
+        </p:nvSpPr>
+        <p:spPr>
+          <a:xfrm>
+            <a:off x="1875658" y="4765299"/>
+            <a:ext cx="992579" cy="369332"/>
+          </a:xfrm>
+          <a:prstGeom prst="rect">
+            <a:avLst/>
+          </a:prstGeom>
+          <a:solidFill>
+            <a:schemeClr val="accent1">
+              <a:lumMod val="75000"/>
+            </a:schemeClr>
+          </a:solidFill>
+        </p:spPr>
+        <p:txBody>
+          <a:bodyPr wrap="none" rtlCol="0">
+            <a:spAutoFit/>
+          </a:bodyPr>
+          <a:lstStyle/>
+          <a:p>
+            <a:pPr algn="r"/>
+            <a:r>
+              <a:rPr lang="en-US" dirty="0">
+                <a:solidFill>
+                  <a:schemeClr val="accent6">
+                    <a:lumMod val="40000"/>
+                    <a:lumOff val="60000"/>
+                  </a:schemeClr>
+                </a:solidFill>
+              </a:rPr>
+              <a:t>Issuer ID</a:t>
+            </a:r>
+          </a:p>
+        </p:txBody>
+      </p:sp>
+      <p:sp>
+        <p:nvSpPr>
+          <p:cNvPr id="15" name="TextBox 14">
+            <a:extLst>
+              <a:ext uri="{FF2B5EF4-FFF2-40B4-BE49-F238E27FC236}">
+                <a16:creationId xmlns:a16="http://schemas.microsoft.com/office/drawing/2014/main" id="{719EC9DB-1D81-DD15-07FD-5F895E0D1372}"/>
+              </a:ext>
+            </a:extLst>
+          </p:cNvPr>
+          <p:cNvSpPr txBox="1"/>
+          <p:nvPr/>
+        </p:nvSpPr>
+        <p:spPr>
+          <a:xfrm>
+            <a:off x="3141743" y="4765299"/>
+            <a:ext cx="1878079" cy="369332"/>
+          </a:xfrm>
+          <a:prstGeom prst="rect">
+            <a:avLst/>
+          </a:prstGeom>
+          <a:solidFill>
+            <a:srgbClr val="F6FAF4"/>
+          </a:solidFill>
+          <a:ln>
+            <a:solidFill>
+              <a:schemeClr val="bg1">
+                <a:lumMod val="75000"/>
+              </a:schemeClr>
+            </a:solidFill>
+          </a:ln>
+        </p:spPr>
+        <p:txBody>
+          <a:bodyPr wrap="none" rtlCol="0">
+            <a:spAutoFit/>
+          </a:bodyPr>
+          <a:lstStyle/>
+          <a:p>
+            <a:pPr algn="ctr"/>
+            <a:r>
+              <a:rPr lang="en-US" noProof="1">
+                <a:cs typeface="Courier New" panose="02070309020205020404" pitchFamily="49" charset="0"/>
+              </a:rPr>
+              <a:t>URL or Host name</a:t>
+            </a:r>
           </a:p>
         </p:txBody>
       </p:sp>

--- a/defensive-publications/emv-data-enhancement.pptx
+++ b/defensive-publications/emv-data-enhancement.pptx
@@ -345,7 +345,7 @@
           <a:p>
             <a:fld id="{FAE6055B-ABBD-4C0D-84D8-CCE0D097BF9D}" type="datetimeFigureOut">
               <a:rPr lang="en-US" smtClean="0"/>
-              <a:t>5/30/24</a:t>
+              <a:t>5/31/24</a:t>
             </a:fld>
             <a:endParaRPr lang="en-US"/>
           </a:p>
@@ -553,7 +553,7 @@
           <a:p>
             <a:fld id="{FAE6055B-ABBD-4C0D-84D8-CCE0D097BF9D}" type="datetimeFigureOut">
               <a:rPr lang="en-US" smtClean="0"/>
-              <a:t>5/30/24</a:t>
+              <a:t>5/31/24</a:t>
             </a:fld>
             <a:endParaRPr lang="en-US"/>
           </a:p>
@@ -751,7 +751,7 @@
           <a:p>
             <a:fld id="{FAE6055B-ABBD-4C0D-84D8-CCE0D097BF9D}" type="datetimeFigureOut">
               <a:rPr lang="en-US" smtClean="0"/>
-              <a:t>5/30/24</a:t>
+              <a:t>5/31/24</a:t>
             </a:fld>
             <a:endParaRPr lang="en-US"/>
           </a:p>
@@ -1026,7 +1026,7 @@
           <a:p>
             <a:fld id="{FAE6055B-ABBD-4C0D-84D8-CCE0D097BF9D}" type="datetimeFigureOut">
               <a:rPr lang="en-US" smtClean="0"/>
-              <a:t>5/30/24</a:t>
+              <a:t>5/31/24</a:t>
             </a:fld>
             <a:endParaRPr lang="en-US"/>
           </a:p>
@@ -1291,7 +1291,7 @@
           <a:p>
             <a:fld id="{FAE6055B-ABBD-4C0D-84D8-CCE0D097BF9D}" type="datetimeFigureOut">
               <a:rPr lang="en-US" smtClean="0"/>
-              <a:t>5/30/24</a:t>
+              <a:t>5/31/24</a:t>
             </a:fld>
             <a:endParaRPr lang="en-US"/>
           </a:p>
@@ -1703,7 +1703,7 @@
           <a:p>
             <a:fld id="{FAE6055B-ABBD-4C0D-84D8-CCE0D097BF9D}" type="datetimeFigureOut">
               <a:rPr lang="en-US" smtClean="0"/>
-              <a:t>5/30/24</a:t>
+              <a:t>5/31/24</a:t>
             </a:fld>
             <a:endParaRPr lang="en-US"/>
           </a:p>
@@ -1844,7 +1844,7 @@
           <a:p>
             <a:fld id="{FAE6055B-ABBD-4C0D-84D8-CCE0D097BF9D}" type="datetimeFigureOut">
               <a:rPr lang="en-US" smtClean="0"/>
-              <a:t>5/30/24</a:t>
+              <a:t>5/31/24</a:t>
             </a:fld>
             <a:endParaRPr lang="en-US"/>
           </a:p>
@@ -1957,7 +1957,7 @@
           <a:p>
             <a:fld id="{FAE6055B-ABBD-4C0D-84D8-CCE0D097BF9D}" type="datetimeFigureOut">
               <a:rPr lang="en-US" smtClean="0"/>
-              <a:t>5/30/24</a:t>
+              <a:t>5/31/24</a:t>
             </a:fld>
             <a:endParaRPr lang="en-US"/>
           </a:p>
@@ -2268,7 +2268,7 @@
           <a:p>
             <a:fld id="{FAE6055B-ABBD-4C0D-84D8-CCE0D097BF9D}" type="datetimeFigureOut">
               <a:rPr lang="en-US" smtClean="0"/>
-              <a:t>5/30/24</a:t>
+              <a:t>5/31/24</a:t>
             </a:fld>
             <a:endParaRPr lang="en-US"/>
           </a:p>
@@ -2556,7 +2556,7 @@
           <a:p>
             <a:fld id="{FAE6055B-ABBD-4C0D-84D8-CCE0D097BF9D}" type="datetimeFigureOut">
               <a:rPr lang="en-US" smtClean="0"/>
-              <a:t>5/30/24</a:t>
+              <a:t>5/31/24</a:t>
             </a:fld>
             <a:endParaRPr lang="en-US"/>
           </a:p>
@@ -2797,7 +2797,7 @@
           <a:p>
             <a:fld id="{FAE6055B-ABBD-4C0D-84D8-CCE0D097BF9D}" type="datetimeFigureOut">
               <a:rPr lang="en-US" smtClean="0"/>
-              <a:t>5/30/24</a:t>
+              <a:t>5/31/24</a:t>
             </a:fld>
             <a:endParaRPr lang="en-US"/>
           </a:p>
@@ -3275,7 +3275,11 @@
           <a:p>
             <a:pPr algn="ctr"/>
             <a:r>
-              <a:rPr lang="en-US" dirty="0"/>
+              <a:rPr lang="en-US" b="1" dirty="0">
+                <a:solidFill>
+                  <a:schemeClr val="tx1"/>
+                </a:solidFill>
+              </a:rPr>
               <a:t> </a:t>
             </a:r>
           </a:p>
@@ -3463,17 +3467,13 @@
         </p:nvSpPr>
         <p:spPr>
           <a:xfrm>
-            <a:off x="1663292" y="2674792"/>
-            <a:ext cx="1204945" cy="369332"/>
+            <a:off x="1644889" y="2674792"/>
+            <a:ext cx="1223348" cy="369332"/>
           </a:xfrm>
           <a:prstGeom prst="rect">
             <a:avLst/>
           </a:prstGeom>
-          <a:solidFill>
-            <a:schemeClr val="accent1">
-              <a:lumMod val="75000"/>
-            </a:schemeClr>
-          </a:solidFill>
+          <a:noFill/>
         </p:spPr>
         <p:txBody>
           <a:bodyPr wrap="none" rtlCol="0">
@@ -3483,14 +3483,7 @@
           <a:p>
             <a:pPr algn="r"/>
             <a:r>
-              <a:rPr lang="en-US" dirty="0">
-                <a:solidFill>
-                  <a:schemeClr val="accent6">
-                    <a:lumMod val="40000"/>
-                    <a:lumOff val="60000"/>
-                  </a:schemeClr>
-                </a:solidFill>
-              </a:rPr>
+              <a:rPr lang="en-US" b="1" dirty="0"/>
               <a:t>Account ID</a:t>
             </a:r>
           </a:p>
@@ -3516,15 +3509,9 @@
           <a:prstGeom prst="rect">
             <a:avLst/>
           </a:prstGeom>
-          <a:solidFill>
-            <a:srgbClr val="F6FAF4"/>
-          </a:solidFill>
+          <a:noFill/>
           <a:ln>
-            <a:solidFill>
-              <a:schemeClr val="bg1">
-                <a:lumMod val="75000"/>
-              </a:schemeClr>
-            </a:solidFill>
+            <a:noFill/>
           </a:ln>
         </p:spPr>
         <p:txBody>
@@ -3557,17 +3544,13 @@
         </p:nvSpPr>
         <p:spPr>
           <a:xfrm>
-            <a:off x="747400" y="3732490"/>
-            <a:ext cx="2120837" cy="369332"/>
+            <a:off x="697322" y="3732490"/>
+            <a:ext cx="2170915" cy="369332"/>
           </a:xfrm>
           <a:prstGeom prst="rect">
             <a:avLst/>
           </a:prstGeom>
-          <a:solidFill>
-            <a:schemeClr val="accent1">
-              <a:lumMod val="75000"/>
-            </a:schemeClr>
-          </a:solidFill>
+          <a:noFill/>
         </p:spPr>
         <p:txBody>
           <a:bodyPr wrap="none" rtlCol="0">
@@ -3577,14 +3560,7 @@
           <a:p>
             <a:pPr algn="r"/>
             <a:r>
-              <a:rPr lang="en-US" dirty="0">
-                <a:solidFill>
-                  <a:schemeClr val="accent6">
-                    <a:lumMod val="40000"/>
-                    <a:lumOff val="60000"/>
-                  </a:schemeClr>
-                </a:solidFill>
-              </a:rPr>
+              <a:rPr lang="en-US" b="1" dirty="0"/>
               <a:t>Payment Network ID</a:t>
             </a:r>
           </a:p>
@@ -3610,15 +3586,9 @@
           <a:prstGeom prst="rect">
             <a:avLst/>
           </a:prstGeom>
-          <a:solidFill>
-            <a:srgbClr val="F6FAF4"/>
-          </a:solidFill>
+          <a:noFill/>
           <a:ln>
-            <a:solidFill>
-              <a:schemeClr val="bg1">
-                <a:lumMod val="75000"/>
-              </a:schemeClr>
-            </a:solidFill>
+            <a:noFill/>
           </a:ln>
         </p:spPr>
         <p:txBody>
@@ -4071,17 +4041,13 @@
         </p:nvSpPr>
         <p:spPr>
           <a:xfrm>
-            <a:off x="1875658" y="4765299"/>
-            <a:ext cx="992579" cy="369332"/>
+            <a:off x="1859628" y="4765299"/>
+            <a:ext cx="1008609" cy="369332"/>
           </a:xfrm>
           <a:prstGeom prst="rect">
             <a:avLst/>
           </a:prstGeom>
-          <a:solidFill>
-            <a:schemeClr val="accent1">
-              <a:lumMod val="75000"/>
-            </a:schemeClr>
-          </a:solidFill>
+          <a:noFill/>
         </p:spPr>
         <p:txBody>
           <a:bodyPr wrap="none" rtlCol="0">
@@ -4091,14 +4057,7 @@
           <a:p>
             <a:pPr algn="r"/>
             <a:r>
-              <a:rPr lang="en-US" dirty="0">
-                <a:solidFill>
-                  <a:schemeClr val="accent6">
-                    <a:lumMod val="40000"/>
-                    <a:lumOff val="60000"/>
-                  </a:schemeClr>
-                </a:solidFill>
-              </a:rPr>
+              <a:rPr lang="en-US" b="1" dirty="0"/>
               <a:t>Issuer ID</a:t>
             </a:r>
           </a:p>
@@ -4124,33 +4083,119 @@
           <a:prstGeom prst="rect">
             <a:avLst/>
           </a:prstGeom>
-          <a:solidFill>
-            <a:srgbClr val="F6FAF4"/>
-          </a:solidFill>
+          <a:noFill/>
           <a:ln>
+            <a:noFill/>
+          </a:ln>
+        </p:spPr>
+        <p:txBody>
+          <a:bodyPr wrap="none" rtlCol="0">
+            <a:spAutoFit/>
+          </a:bodyPr>
+          <a:lstStyle/>
+          <a:p>
+            <a:pPr algn="ctr"/>
+            <a:r>
+              <a:rPr lang="en-US" noProof="1">
+                <a:cs typeface="Courier New" panose="02070309020205020404" pitchFamily="49" charset="0"/>
+              </a:rPr>
+              <a:t>URL or Host name</a:t>
+            </a:r>
+          </a:p>
+        </p:txBody>
+      </p:sp>
+      <p:cxnSp>
+        <p:nvCxnSpPr>
+          <p:cNvPr id="3" name="Straight Connector 2">
+            <a:extLst>
+              <a:ext uri="{FF2B5EF4-FFF2-40B4-BE49-F238E27FC236}">
+                <a16:creationId xmlns:a16="http://schemas.microsoft.com/office/drawing/2014/main" id="{A46141A1-3F97-1098-BA61-AF92900E6875}"/>
+              </a:ext>
+            </a:extLst>
+          </p:cNvPr>
+          <p:cNvCxnSpPr>
+            <a:cxnSpLocks/>
+          </p:cNvCxnSpPr>
+          <p:nvPr/>
+        </p:nvCxnSpPr>
+        <p:spPr>
+          <a:xfrm>
+            <a:off x="3041625" y="2275389"/>
+            <a:ext cx="0" cy="3200091"/>
+          </a:xfrm>
+          <a:prstGeom prst="line">
+            <a:avLst/>
+          </a:prstGeom>
+          <a:ln w="12700">
             <a:solidFill>
-              <a:schemeClr val="bg1">
-                <a:lumMod val="75000"/>
+              <a:schemeClr val="tx1">
+                <a:lumMod val="65000"/>
+                <a:lumOff val="35000"/>
               </a:schemeClr>
             </a:solidFill>
           </a:ln>
         </p:spPr>
-        <p:txBody>
-          <a:bodyPr wrap="none" rtlCol="0">
-            <a:spAutoFit/>
-          </a:bodyPr>
-          <a:lstStyle/>
-          <a:p>
-            <a:pPr algn="ctr"/>
-            <a:r>
-              <a:rPr lang="en-US" noProof="1">
-                <a:cs typeface="Courier New" panose="02070309020205020404" pitchFamily="49" charset="0"/>
-              </a:rPr>
-              <a:t>URL or Host name</a:t>
-            </a:r>
-          </a:p>
-        </p:txBody>
-      </p:sp>
+        <p:style>
+          <a:lnRef idx="1">
+            <a:schemeClr val="accent1"/>
+          </a:lnRef>
+          <a:fillRef idx="0">
+            <a:schemeClr val="accent1"/>
+          </a:fillRef>
+          <a:effectRef idx="0">
+            <a:schemeClr val="accent1"/>
+          </a:effectRef>
+          <a:fontRef idx="minor">
+            <a:schemeClr val="tx1"/>
+          </a:fontRef>
+        </p:style>
+      </p:cxnSp>
+      <p:cxnSp>
+        <p:nvCxnSpPr>
+          <p:cNvPr id="16" name="Straight Connector 15">
+            <a:extLst>
+              <a:ext uri="{FF2B5EF4-FFF2-40B4-BE49-F238E27FC236}">
+                <a16:creationId xmlns:a16="http://schemas.microsoft.com/office/drawing/2014/main" id="{7CF1380E-4ED5-8EAA-E158-B722B91FE1A7}"/>
+              </a:ext>
+            </a:extLst>
+          </p:cNvPr>
+          <p:cNvCxnSpPr>
+            <a:cxnSpLocks/>
+          </p:cNvCxnSpPr>
+          <p:nvPr/>
+        </p:nvCxnSpPr>
+        <p:spPr>
+          <a:xfrm>
+            <a:off x="5059578" y="2275389"/>
+            <a:ext cx="0" cy="3200091"/>
+          </a:xfrm>
+          <a:prstGeom prst="line">
+            <a:avLst/>
+          </a:prstGeom>
+          <a:ln w="12700">
+            <a:solidFill>
+              <a:schemeClr val="tx1">
+                <a:lumMod val="65000"/>
+                <a:lumOff val="35000"/>
+              </a:schemeClr>
+            </a:solidFill>
+          </a:ln>
+        </p:spPr>
+        <p:style>
+          <a:lnRef idx="1">
+            <a:schemeClr val="accent1"/>
+          </a:lnRef>
+          <a:fillRef idx="0">
+            <a:schemeClr val="accent1"/>
+          </a:fillRef>
+          <a:effectRef idx="0">
+            <a:schemeClr val="accent1"/>
+          </a:effectRef>
+          <a:fontRef idx="minor">
+            <a:schemeClr val="tx1"/>
+          </a:fontRef>
+        </p:style>
+      </p:cxnSp>
     </p:spTree>
     <p:extLst>
       <p:ext uri="{BB962C8B-B14F-4D97-AF65-F5344CB8AC3E}">
